--- a/instructor/slides/pptx/lectures/L47.pptx
+++ b/instructor/slides/pptx/lectures/L47.pptx
@@ -4233,8 +4233,8 @@
         </p:nvSpPr>
         <p:spPr>
           <a:xfrm>
-            <a:off x="640080" y="1920240"/>
-            <a:ext cx="10972800" cy="1463040"/>
+            <a:off x="640080" y="1828800"/>
+            <a:ext cx="6675120" cy="1645920"/>
           </a:xfrm>
           <a:prstGeom prst="rect">
             <a:avLst/>
@@ -4248,7 +4248,7 @@
           <a:lstStyle/>
           <a:p>
             <a:r>
-              <a:rPr sz="4400" b="1">
+              <a:rPr sz="4000" b="1">
                 <a:solidFill>
                   <a:srgbClr val="FFFFFF"/>
                 </a:solidFill>
@@ -4267,8 +4267,8 @@
         </p:nvSpPr>
         <p:spPr>
           <a:xfrm>
-            <a:off x="640080" y="3657600"/>
-            <a:ext cx="10789920" cy="1097280"/>
+            <a:off x="640080" y="3794760"/>
+            <a:ext cx="6675120" cy="1097280"/>
           </a:xfrm>
           <a:prstGeom prst="rect">
             <a:avLst/>
@@ -4282,7 +4282,7 @@
           <a:lstStyle/>
           <a:p>
             <a:r>
-              <a:rPr sz="2000" b="0">
+              <a:rPr sz="1800" b="0">
                 <a:solidFill>
                   <a:srgbClr val="B7CBDE"/>
                 </a:solidFill>
@@ -4301,8 +4301,8 @@
         </p:nvSpPr>
         <p:spPr>
           <a:xfrm>
-            <a:off x="640080" y="5029200"/>
-            <a:ext cx="10972800" cy="457200"/>
+            <a:off x="640080" y="5120640"/>
+            <a:ext cx="6766560" cy="457200"/>
           </a:xfrm>
           <a:prstGeom prst="rect">
             <a:avLst/>
@@ -4316,7 +4316,7 @@
           <a:lstStyle/>
           <a:p>
             <a:r>
-              <a:rPr sz="1600" b="0">
+              <a:rPr sz="1500" b="0">
                 <a:solidFill>
                   <a:srgbClr val="3EC6FF"/>
                 </a:solidFill>
@@ -4327,6 +4327,30 @@
           </a:p>
         </p:txBody>
       </p:sp>
+      <p:pic>
+        <p:nvPicPr>
+          <p:cNvPr id="7" name="Picture 6" descr="dw-recursion.jpg"/>
+          <p:cNvPicPr>
+            <a:picLocks noChangeAspect="1"/>
+          </p:cNvPicPr>
+          <p:nvPr/>
+        </p:nvPicPr>
+        <p:blipFill>
+          <a:blip r:embed="rId2"/>
+          <a:stretch>
+            <a:fillRect/>
+          </a:stretch>
+        </p:blipFill>
+        <p:spPr>
+          <a:xfrm>
+            <a:off x="7452360" y="1325880"/>
+            <a:ext cx="4160520" cy="4160520"/>
+          </a:xfrm>
+          <a:prstGeom prst="rect">
+            <a:avLst/>
+          </a:prstGeom>
+        </p:spPr>
+      </p:pic>
     </p:spTree>
   </p:cSld>
   <p:clrMapOvr>
@@ -4430,8 +4454,8 @@
         </p:nvSpPr>
         <p:spPr>
           <a:xfrm>
-            <a:off x="640080" y="685800"/>
-            <a:ext cx="10972800" cy="1463040"/>
+            <a:off x="640080" y="658368"/>
+            <a:ext cx="10972800" cy="1645920"/>
           </a:xfrm>
           <a:prstGeom prst="rect">
             <a:avLst/>
@@ -4445,7 +4469,7 @@
           <a:lstStyle/>
           <a:p>
             <a:r>
-              <a:rPr sz="3200" b="1">
+              <a:rPr sz="3000" b="1">
                 <a:solidFill>
                   <a:srgbClr val="FFFFFF"/>
                 </a:solidFill>
@@ -4695,8 +4719,8 @@
         </p:nvSpPr>
         <p:spPr>
           <a:xfrm>
-            <a:off x="640080" y="685800"/>
-            <a:ext cx="10972800" cy="1463040"/>
+            <a:off x="640080" y="658368"/>
+            <a:ext cx="7863840" cy="1645920"/>
           </a:xfrm>
           <a:prstGeom prst="rect">
             <a:avLst/>
@@ -4710,7 +4734,7 @@
           <a:lstStyle/>
           <a:p>
             <a:r>
-              <a:rPr sz="3200" b="1">
+              <a:rPr sz="3000" b="1">
                 <a:solidFill>
                   <a:srgbClr val="FFFFFF"/>
                 </a:solidFill>
@@ -4729,8 +4753,8 @@
         </p:nvSpPr>
         <p:spPr>
           <a:xfrm>
-            <a:off x="777240" y="2286000"/>
-            <a:ext cx="10607040" cy="4754880"/>
+            <a:off x="777240" y="2331720"/>
+            <a:ext cx="7498079" cy="4754880"/>
           </a:xfrm>
           <a:prstGeom prst="rect">
             <a:avLst/>
@@ -4749,7 +4773,7 @@
               </a:spcAft>
             </a:pPr>
             <a:r>
-              <a:rPr sz="2400" b="0">
+              <a:rPr sz="2200" b="0">
                 <a:solidFill>
                   <a:srgbClr val="FFFFFF"/>
                 </a:solidFill>
@@ -4760,6 +4784,30 @@
           </a:p>
         </p:txBody>
       </p:sp>
+      <p:pic>
+        <p:nvPicPr>
+          <p:cNvPr id="6" name="Picture 5" descr="dw-recursion.jpg"/>
+          <p:cNvPicPr>
+            <a:picLocks noChangeAspect="1"/>
+          </p:cNvPicPr>
+          <p:nvPr/>
+        </p:nvPicPr>
+        <p:blipFill>
+          <a:blip r:embed="rId2"/>
+          <a:stretch>
+            <a:fillRect/>
+          </a:stretch>
+        </p:blipFill>
+        <p:spPr>
+          <a:xfrm>
+            <a:off x="8732520" y="2057400"/>
+            <a:ext cx="2880360" cy="2880360"/>
+          </a:xfrm>
+          <a:prstGeom prst="rect">
+            <a:avLst/>
+          </a:prstGeom>
+        </p:spPr>
+      </p:pic>
     </p:spTree>
   </p:cSld>
   <p:clrMapOvr>
@@ -4863,8 +4911,8 @@
         </p:nvSpPr>
         <p:spPr>
           <a:xfrm>
-            <a:off x="640080" y="685800"/>
-            <a:ext cx="10972800" cy="1463040"/>
+            <a:off x="640080" y="658368"/>
+            <a:ext cx="7863840" cy="1645920"/>
           </a:xfrm>
           <a:prstGeom prst="rect">
             <a:avLst/>
@@ -4878,7 +4926,7 @@
           <a:lstStyle/>
           <a:p>
             <a:r>
-              <a:rPr sz="3200" b="1">
+              <a:rPr sz="3000" b="1">
                 <a:solidFill>
                   <a:srgbClr val="FFFFFF"/>
                 </a:solidFill>
@@ -4897,8 +4945,8 @@
         </p:nvSpPr>
         <p:spPr>
           <a:xfrm>
-            <a:off x="777240" y="2286000"/>
-            <a:ext cx="10607040" cy="4754880"/>
+            <a:off x="777240" y="2331720"/>
+            <a:ext cx="7498079" cy="4754880"/>
           </a:xfrm>
           <a:prstGeom prst="rect">
             <a:avLst/>
@@ -4917,7 +4965,7 @@
               </a:spcAft>
             </a:pPr>
             <a:r>
-              <a:rPr sz="2400" b="0">
+              <a:rPr sz="2200" b="0">
                 <a:solidFill>
                   <a:srgbClr val="FFFFFF"/>
                 </a:solidFill>
@@ -4928,6 +4976,30 @@
           </a:p>
         </p:txBody>
       </p:sp>
+      <p:pic>
+        <p:nvPicPr>
+          <p:cNvPr id="6" name="Picture 5" descr="dw-recursion.jpg"/>
+          <p:cNvPicPr>
+            <a:picLocks noChangeAspect="1"/>
+          </p:cNvPicPr>
+          <p:nvPr/>
+        </p:nvPicPr>
+        <p:blipFill>
+          <a:blip r:embed="rId2"/>
+          <a:stretch>
+            <a:fillRect/>
+          </a:stretch>
+        </p:blipFill>
+        <p:spPr>
+          <a:xfrm>
+            <a:off x="8732520" y="2057400"/>
+            <a:ext cx="2880360" cy="2880360"/>
+          </a:xfrm>
+          <a:prstGeom prst="rect">
+            <a:avLst/>
+          </a:prstGeom>
+        </p:spPr>
+      </p:pic>
     </p:spTree>
   </p:cSld>
   <p:clrMapOvr>
@@ -5031,8 +5103,8 @@
         </p:nvSpPr>
         <p:spPr>
           <a:xfrm>
-            <a:off x="640080" y="685800"/>
-            <a:ext cx="10972800" cy="1463040"/>
+            <a:off x="640080" y="658368"/>
+            <a:ext cx="7863840" cy="1645920"/>
           </a:xfrm>
           <a:prstGeom prst="rect">
             <a:avLst/>
@@ -5046,7 +5118,7 @@
           <a:lstStyle/>
           <a:p>
             <a:r>
-              <a:rPr sz="3200" b="1">
+              <a:rPr sz="3000" b="1">
                 <a:solidFill>
                   <a:srgbClr val="FFFFFF"/>
                 </a:solidFill>
@@ -5065,8 +5137,8 @@
         </p:nvSpPr>
         <p:spPr>
           <a:xfrm>
-            <a:off x="777240" y="2286000"/>
-            <a:ext cx="10607040" cy="4754880"/>
+            <a:off x="777240" y="2331720"/>
+            <a:ext cx="7498079" cy="4754880"/>
           </a:xfrm>
           <a:prstGeom prst="rect">
             <a:avLst/>
@@ -5085,7 +5157,7 @@
               </a:spcAft>
             </a:pPr>
             <a:r>
-              <a:rPr sz="2400" b="0">
+              <a:rPr sz="2200" b="0">
                 <a:solidFill>
                   <a:srgbClr val="FFFFFF"/>
                 </a:solidFill>
@@ -5101,7 +5173,7 @@
               </a:spcAft>
             </a:pPr>
             <a:r>
-              <a:rPr sz="2400" b="0">
+              <a:rPr sz="2200" b="0">
                 <a:solidFill>
                   <a:srgbClr val="FFFFFF"/>
                 </a:solidFill>
@@ -5112,6 +5184,30 @@
           </a:p>
         </p:txBody>
       </p:sp>
+      <p:pic>
+        <p:nvPicPr>
+          <p:cNvPr id="6" name="Picture 5" descr="dw-recursion.jpg"/>
+          <p:cNvPicPr>
+            <a:picLocks noChangeAspect="1"/>
+          </p:cNvPicPr>
+          <p:nvPr/>
+        </p:nvPicPr>
+        <p:blipFill>
+          <a:blip r:embed="rId2"/>
+          <a:stretch>
+            <a:fillRect/>
+          </a:stretch>
+        </p:blipFill>
+        <p:spPr>
+          <a:xfrm>
+            <a:off x="8732520" y="2057400"/>
+            <a:ext cx="2880360" cy="2880360"/>
+          </a:xfrm>
+          <a:prstGeom prst="rect">
+            <a:avLst/>
+          </a:prstGeom>
+        </p:spPr>
+      </p:pic>
     </p:spTree>
   </p:cSld>
   <p:clrMapOvr>
@@ -5215,8 +5311,8 @@
         </p:nvSpPr>
         <p:spPr>
           <a:xfrm>
-            <a:off x="640080" y="685800"/>
-            <a:ext cx="10972800" cy="1463040"/>
+            <a:off x="640080" y="658368"/>
+            <a:ext cx="10972800" cy="1645920"/>
           </a:xfrm>
           <a:prstGeom prst="rect">
             <a:avLst/>
@@ -5230,7 +5326,7 @@
           <a:lstStyle/>
           <a:p>
             <a:r>
-              <a:rPr sz="3200" b="1">
+              <a:rPr sz="3000" b="1">
                 <a:solidFill>
                   <a:srgbClr val="FFFFFF"/>
                 </a:solidFill>
@@ -5480,8 +5576,8 @@
         </p:nvSpPr>
         <p:spPr>
           <a:xfrm>
-            <a:off x="640080" y="685800"/>
-            <a:ext cx="10972800" cy="1463040"/>
+            <a:off x="640080" y="658368"/>
+            <a:ext cx="7863840" cy="1645920"/>
           </a:xfrm>
           <a:prstGeom prst="rect">
             <a:avLst/>
@@ -5495,7 +5591,7 @@
           <a:lstStyle/>
           <a:p>
             <a:r>
-              <a:rPr sz="3200" b="1">
+              <a:rPr sz="3000" b="1">
                 <a:solidFill>
                   <a:srgbClr val="FFFFFF"/>
                 </a:solidFill>
@@ -5514,8 +5610,8 @@
         </p:nvSpPr>
         <p:spPr>
           <a:xfrm>
-            <a:off x="777240" y="2286000"/>
-            <a:ext cx="10607040" cy="4754880"/>
+            <a:off x="777240" y="2331720"/>
+            <a:ext cx="7498079" cy="4754880"/>
           </a:xfrm>
           <a:prstGeom prst="rect">
             <a:avLst/>
@@ -5534,7 +5630,7 @@
               </a:spcAft>
             </a:pPr>
             <a:r>
-              <a:rPr sz="2400" b="0">
+              <a:rPr sz="2200" b="0">
                 <a:solidFill>
                   <a:srgbClr val="FFFFFF"/>
                 </a:solidFill>
@@ -5550,7 +5646,7 @@
               </a:spcAft>
             </a:pPr>
             <a:r>
-              <a:rPr sz="2400" b="0">
+              <a:rPr sz="2200" b="0">
                 <a:solidFill>
                   <a:srgbClr val="FFFFFF"/>
                 </a:solidFill>
@@ -5566,7 +5662,7 @@
               </a:spcAft>
             </a:pPr>
             <a:r>
-              <a:rPr sz="2400" b="0">
+              <a:rPr sz="2200" b="0">
                 <a:solidFill>
                   <a:srgbClr val="FFFFFF"/>
                 </a:solidFill>
@@ -5577,6 +5673,30 @@
           </a:p>
         </p:txBody>
       </p:sp>
+      <p:pic>
+        <p:nvPicPr>
+          <p:cNvPr id="6" name="Picture 5" descr="dw-recursion.jpg"/>
+          <p:cNvPicPr>
+            <a:picLocks noChangeAspect="1"/>
+          </p:cNvPicPr>
+          <p:nvPr/>
+        </p:nvPicPr>
+        <p:blipFill>
+          <a:blip r:embed="rId2"/>
+          <a:stretch>
+            <a:fillRect/>
+          </a:stretch>
+        </p:blipFill>
+        <p:spPr>
+          <a:xfrm>
+            <a:off x="8732520" y="2057400"/>
+            <a:ext cx="2880360" cy="2880360"/>
+          </a:xfrm>
+          <a:prstGeom prst="rect">
+            <a:avLst/>
+          </a:prstGeom>
+        </p:spPr>
+      </p:pic>
     </p:spTree>
   </p:cSld>
   <p:clrMapOvr>
@@ -5680,8 +5800,8 @@
         </p:nvSpPr>
         <p:spPr>
           <a:xfrm>
-            <a:off x="640080" y="685800"/>
-            <a:ext cx="10972800" cy="1463040"/>
+            <a:off x="640080" y="658368"/>
+            <a:ext cx="10972800" cy="1645920"/>
           </a:xfrm>
           <a:prstGeom prst="rect">
             <a:avLst/>
@@ -5695,7 +5815,7 @@
           <a:lstStyle/>
           <a:p>
             <a:r>
-              <a:rPr sz="3200" b="1">
+              <a:rPr sz="3000" b="1">
                 <a:solidFill>
                   <a:srgbClr val="FFFFFF"/>
                 </a:solidFill>
@@ -6009,8 +6129,8 @@
         </p:nvSpPr>
         <p:spPr>
           <a:xfrm>
-            <a:off x="640080" y="685800"/>
-            <a:ext cx="10972800" cy="1463040"/>
+            <a:off x="640080" y="658368"/>
+            <a:ext cx="7863840" cy="1645920"/>
           </a:xfrm>
           <a:prstGeom prst="rect">
             <a:avLst/>
@@ -6024,7 +6144,7 @@
           <a:lstStyle/>
           <a:p>
             <a:r>
-              <a:rPr sz="3200" b="1">
+              <a:rPr sz="3000" b="1">
                 <a:solidFill>
                   <a:srgbClr val="FFFFFF"/>
                 </a:solidFill>
@@ -6043,8 +6163,8 @@
         </p:nvSpPr>
         <p:spPr>
           <a:xfrm>
-            <a:off x="777240" y="2286000"/>
-            <a:ext cx="10607040" cy="4754880"/>
+            <a:off x="777240" y="2331720"/>
+            <a:ext cx="7498079" cy="4754880"/>
           </a:xfrm>
           <a:prstGeom prst="rect">
             <a:avLst/>
@@ -6063,7 +6183,7 @@
               </a:spcAft>
             </a:pPr>
             <a:r>
-              <a:rPr sz="2400" b="0">
+              <a:rPr sz="2200" b="0">
                 <a:solidFill>
                   <a:srgbClr val="FFFFFF"/>
                 </a:solidFill>
@@ -6079,7 +6199,7 @@
               </a:spcAft>
             </a:pPr>
             <a:r>
-              <a:rPr sz="2400" b="0">
+              <a:rPr sz="2200" b="0">
                 <a:solidFill>
                   <a:srgbClr val="FFFFFF"/>
                 </a:solidFill>
@@ -6090,6 +6210,30 @@
           </a:p>
         </p:txBody>
       </p:sp>
+      <p:pic>
+        <p:nvPicPr>
+          <p:cNvPr id="6" name="Picture 5" descr="dw-recursion.jpg"/>
+          <p:cNvPicPr>
+            <a:picLocks noChangeAspect="1"/>
+          </p:cNvPicPr>
+          <p:nvPr/>
+        </p:nvPicPr>
+        <p:blipFill>
+          <a:blip r:embed="rId2"/>
+          <a:stretch>
+            <a:fillRect/>
+          </a:stretch>
+        </p:blipFill>
+        <p:spPr>
+          <a:xfrm>
+            <a:off x="8732520" y="2057400"/>
+            <a:ext cx="2880360" cy="2880360"/>
+          </a:xfrm>
+          <a:prstGeom prst="rect">
+            <a:avLst/>
+          </a:prstGeom>
+        </p:spPr>
+      </p:pic>
     </p:spTree>
   </p:cSld>
   <p:clrMapOvr>
@@ -6193,8 +6337,8 @@
         </p:nvSpPr>
         <p:spPr>
           <a:xfrm>
-            <a:off x="640080" y="685800"/>
-            <a:ext cx="10972800" cy="1463040"/>
+            <a:off x="640080" y="658368"/>
+            <a:ext cx="10972800" cy="1645920"/>
           </a:xfrm>
           <a:prstGeom prst="rect">
             <a:avLst/>
@@ -6208,7 +6352,7 @@
           <a:lstStyle/>
           <a:p>
             <a:r>
-              <a:rPr sz="3200" b="1">
+              <a:rPr sz="3000" b="1">
                 <a:solidFill>
                   <a:srgbClr val="FFFFFF"/>
                 </a:solidFill>
@@ -6474,8 +6618,8 @@
         </p:nvSpPr>
         <p:spPr>
           <a:xfrm>
-            <a:off x="640080" y="685800"/>
-            <a:ext cx="10972800" cy="1463040"/>
+            <a:off x="640080" y="658368"/>
+            <a:ext cx="7863840" cy="1645920"/>
           </a:xfrm>
           <a:prstGeom prst="rect">
             <a:avLst/>
@@ -6489,7 +6633,7 @@
           <a:lstStyle/>
           <a:p>
             <a:r>
-              <a:rPr sz="3200" b="1">
+              <a:rPr sz="3000" b="1">
                 <a:solidFill>
                   <a:srgbClr val="FFFFFF"/>
                 </a:solidFill>
@@ -6508,8 +6652,8 @@
         </p:nvSpPr>
         <p:spPr>
           <a:xfrm>
-            <a:off x="777240" y="2286000"/>
-            <a:ext cx="10607040" cy="4754880"/>
+            <a:off x="777240" y="2331720"/>
+            <a:ext cx="7498079" cy="4754880"/>
           </a:xfrm>
           <a:prstGeom prst="rect">
             <a:avLst/>
@@ -6528,7 +6672,7 @@
               </a:spcAft>
             </a:pPr>
             <a:r>
-              <a:rPr sz="2400" b="0">
+              <a:rPr sz="2200" b="0">
                 <a:solidFill>
                   <a:srgbClr val="FFFFFF"/>
                 </a:solidFill>
@@ -6544,7 +6688,7 @@
               </a:spcAft>
             </a:pPr>
             <a:r>
-              <a:rPr sz="2400" b="0">
+              <a:rPr sz="2200" b="0">
                 <a:solidFill>
                   <a:srgbClr val="FFFFFF"/>
                 </a:solidFill>
@@ -6555,6 +6699,30 @@
           </a:p>
         </p:txBody>
       </p:sp>
+      <p:pic>
+        <p:nvPicPr>
+          <p:cNvPr id="6" name="Picture 5" descr="dw-recursion.jpg"/>
+          <p:cNvPicPr>
+            <a:picLocks noChangeAspect="1"/>
+          </p:cNvPicPr>
+          <p:nvPr/>
+        </p:nvPicPr>
+        <p:blipFill>
+          <a:blip r:embed="rId2"/>
+          <a:stretch>
+            <a:fillRect/>
+          </a:stretch>
+        </p:blipFill>
+        <p:spPr>
+          <a:xfrm>
+            <a:off x="8732520" y="2057400"/>
+            <a:ext cx="2880360" cy="2880360"/>
+          </a:xfrm>
+          <a:prstGeom prst="rect">
+            <a:avLst/>
+          </a:prstGeom>
+        </p:spPr>
+      </p:pic>
     </p:spTree>
   </p:cSld>
   <p:clrMapOvr>
